--- a/docs/assets/downloads/operational-agents.pptx
+++ b/docs/assets/downloads/operational-agents.pptx
@@ -3191,7 +3191,7 @@
       </p:grpSpPr>
       <p:pic>
         <p:nvPicPr>
-          <p:cNvPr id="2" name="Image 0" descr="/home/marco/fy27-hackathons/frontier-ai-starter-kit-rvas/docs/assets/img/logo-mark-white-slide.png">    </p:cNvPr>
+          <p:cNvPr id="2" name="Image 0" descr="/Users/marco/Desktop/repo/frontier-agentic-cobuild-rvas/docs/assets/img/logo-mark-white-slide.png">    </p:cNvPr>
           <p:cNvPicPr>
             <a:picLocks noChangeAspect="1"/>
           </p:cNvPicPr>
@@ -3471,7 +3471,7 @@
       </p:sp>
       <p:pic>
         <p:nvPicPr>
-          <p:cNvPr id="3" name="Image 0" descr="/home/marco/fy27-hackathons/frontier-ai-starter-kit-rvas/docs/assets/img/logo-mark-slide.png">    </p:cNvPr>
+          <p:cNvPr id="3" name="Image 0" descr="/Users/marco/Desktop/repo/frontier-agentic-cobuild-rvas/docs/assets/img/logo-mark-slide.png">    </p:cNvPr>
           <p:cNvPicPr>
             <a:picLocks noChangeAspect="1"/>
           </p:cNvPicPr>
@@ -3751,7 +3751,7 @@
       </p:sp>
       <p:pic>
         <p:nvPicPr>
-          <p:cNvPr id="3" name="Image 0" descr="/home/marco/fy27-hackathons/frontier-ai-starter-kit-rvas/docs/assets/img/logo-mark-slide.png">    </p:cNvPr>
+          <p:cNvPr id="3" name="Image 0" descr="/Users/marco/Desktop/repo/frontier-agentic-cobuild-rvas/docs/assets/img/logo-mark-slide.png">    </p:cNvPr>
           <p:cNvPicPr>
             <a:picLocks noChangeAspect="1"/>
           </p:cNvPicPr>
@@ -4031,7 +4031,7 @@
       </p:sp>
       <p:pic>
         <p:nvPicPr>
-          <p:cNvPr id="3" name="Image 0" descr="/home/marco/fy27-hackathons/frontier-ai-starter-kit-rvas/docs/assets/img/logo-mark-slide.png">    </p:cNvPr>
+          <p:cNvPr id="3" name="Image 0" descr="/Users/marco/Desktop/repo/frontier-agentic-cobuild-rvas/docs/assets/img/logo-mark-slide.png">    </p:cNvPr>
           <p:cNvPicPr>
             <a:picLocks noChangeAspect="1"/>
           </p:cNvPicPr>
@@ -4311,7 +4311,7 @@
       </p:sp>
       <p:pic>
         <p:nvPicPr>
-          <p:cNvPr id="3" name="Image 0" descr="/home/marco/fy27-hackathons/frontier-ai-starter-kit-rvas/docs/assets/img/logo-mark-slide.png">    </p:cNvPr>
+          <p:cNvPr id="3" name="Image 0" descr="/Users/marco/Desktop/repo/frontier-agentic-cobuild-rvas/docs/assets/img/logo-mark-slide.png">    </p:cNvPr>
           <p:cNvPicPr>
             <a:picLocks noChangeAspect="1"/>
           </p:cNvPicPr>
@@ -5235,7 +5235,7 @@
       </p:sp>
       <p:pic>
         <p:nvPicPr>
-          <p:cNvPr id="3" name="Image 0" descr="/home/marco/fy27-hackathons/frontier-ai-starter-kit-rvas/docs/assets/img/logo-mark-slide.png">    </p:cNvPr>
+          <p:cNvPr id="3" name="Image 0" descr="/Users/marco/Desktop/repo/frontier-agentic-cobuild-rvas/docs/assets/img/logo-mark-slide.png">    </p:cNvPr>
           <p:cNvPicPr>
             <a:picLocks noChangeAspect="1"/>
           </p:cNvPicPr>
@@ -5515,7 +5515,7 @@
       </p:sp>
       <p:pic>
         <p:nvPicPr>
-          <p:cNvPr id="3" name="Image 0" descr="/home/marco/fy27-hackathons/frontier-ai-starter-kit-rvas/docs/assets/img/logo-mark-slide.png">    </p:cNvPr>
+          <p:cNvPr id="3" name="Image 0" descr="/Users/marco/Desktop/repo/frontier-agentic-cobuild-rvas/docs/assets/img/logo-mark-slide.png">    </p:cNvPr>
           <p:cNvPicPr>
             <a:picLocks noChangeAspect="1"/>
           </p:cNvPicPr>
@@ -5795,7 +5795,7 @@
       </p:sp>
       <p:pic>
         <p:nvPicPr>
-          <p:cNvPr id="3" name="Image 0" descr="/home/marco/fy27-hackathons/frontier-ai-starter-kit-rvas/docs/assets/img/logo-mark-slide.png">    </p:cNvPr>
+          <p:cNvPr id="3" name="Image 0" descr="/Users/marco/Desktop/repo/frontier-agentic-cobuild-rvas/docs/assets/img/logo-mark-slide.png">    </p:cNvPr>
           <p:cNvPicPr>
             <a:picLocks noChangeAspect="1"/>
           </p:cNvPicPr>
@@ -6075,7 +6075,7 @@
       </p:sp>
       <p:pic>
         <p:nvPicPr>
-          <p:cNvPr id="3" name="Image 0" descr="/home/marco/fy27-hackathons/frontier-ai-starter-kit-rvas/docs/assets/img/logo-mark-slide.png">    </p:cNvPr>
+          <p:cNvPr id="3" name="Image 0" descr="/Users/marco/Desktop/repo/frontier-agentic-cobuild-rvas/docs/assets/img/logo-mark-slide.png">    </p:cNvPr>
           <p:cNvPicPr>
             <a:picLocks noChangeAspect="1"/>
           </p:cNvPicPr>
@@ -6355,7 +6355,7 @@
       </p:sp>
       <p:pic>
         <p:nvPicPr>
-          <p:cNvPr id="3" name="Image 0" descr="/home/marco/fy27-hackathons/frontier-ai-starter-kit-rvas/docs/assets/img/logo-mark-slide.png">    </p:cNvPr>
+          <p:cNvPr id="3" name="Image 0" descr="/Users/marco/Desktop/repo/frontier-agentic-cobuild-rvas/docs/assets/img/logo-mark-slide.png">    </p:cNvPr>
           <p:cNvPicPr>
             <a:picLocks noChangeAspect="1"/>
           </p:cNvPicPr>
@@ -6635,7 +6635,7 @@
       </p:sp>
       <p:pic>
         <p:nvPicPr>
-          <p:cNvPr id="3" name="Image 0" descr="/home/marco/fy27-hackathons/frontier-ai-starter-kit-rvas/docs/assets/img/logo-mark-slide.png">    </p:cNvPr>
+          <p:cNvPr id="3" name="Image 0" descr="/Users/marco/Desktop/repo/frontier-agentic-cobuild-rvas/docs/assets/img/logo-mark-slide.png">    </p:cNvPr>
           <p:cNvPicPr>
             <a:picLocks noChangeAspect="1"/>
           </p:cNvPicPr>
@@ -6888,7 +6888,7 @@
       </p:grpSpPr>
       <p:pic>
         <p:nvPicPr>
-          <p:cNvPr id="2" name="Image 0" descr="/home/marco/fy27-hackathons/frontier-ai-starter-kit-rvas/docs/assets/img/logo-mark-white-slide.png">    </p:cNvPr>
+          <p:cNvPr id="2" name="Image 0" descr="/Users/marco/Desktop/repo/frontier-agentic-cobuild-rvas/docs/assets/img/logo-mark-white-slide.png">    </p:cNvPr>
           <p:cNvPicPr>
             <a:picLocks noChangeAspect="1"/>
           </p:cNvPicPr>
@@ -7738,7 +7738,7 @@
       </p:sp>
       <p:pic>
         <p:nvPicPr>
-          <p:cNvPr id="3" name="Image 0" descr="/home/marco/fy27-hackathons/frontier-ai-starter-kit-rvas/docs/assets/img/logo-mark-slide.png">    </p:cNvPr>
+          <p:cNvPr id="3" name="Image 0" descr="/Users/marco/Desktop/repo/frontier-agentic-cobuild-rvas/docs/assets/img/logo-mark-slide.png">    </p:cNvPr>
           <p:cNvPicPr>
             <a:picLocks noChangeAspect="1"/>
           </p:cNvPicPr>
@@ -8018,7 +8018,7 @@
       </p:sp>
       <p:pic>
         <p:nvPicPr>
-          <p:cNvPr id="3" name="Image 0" descr="/home/marco/fy27-hackathons/frontier-ai-starter-kit-rvas/docs/assets/img/logo-mark-slide.png">    </p:cNvPr>
+          <p:cNvPr id="3" name="Image 0" descr="/Users/marco/Desktop/repo/frontier-agentic-cobuild-rvas/docs/assets/img/logo-mark-slide.png">    </p:cNvPr>
           <p:cNvPicPr>
             <a:picLocks noChangeAspect="1"/>
           </p:cNvPicPr>
@@ -8298,7 +8298,7 @@
       </p:sp>
       <p:pic>
         <p:nvPicPr>
-          <p:cNvPr id="3" name="Image 0" descr="/home/marco/fy27-hackathons/frontier-ai-starter-kit-rvas/docs/assets/img/logo-mark-slide.png">    </p:cNvPr>
+          <p:cNvPr id="3" name="Image 0" descr="/Users/marco/Desktop/repo/frontier-agentic-cobuild-rvas/docs/assets/img/logo-mark-slide.png">    </p:cNvPr>
           <p:cNvPicPr>
             <a:picLocks noChangeAspect="1"/>
           </p:cNvPicPr>
@@ -9084,7 +9084,7 @@
       </p:sp>
       <p:pic>
         <p:nvPicPr>
-          <p:cNvPr id="3" name="Image 0" descr="/home/marco/fy27-hackathons/frontier-ai-starter-kit-rvas/docs/assets/img/logo-mark-slide.png">    </p:cNvPr>
+          <p:cNvPr id="3" name="Image 0" descr="/Users/marco/Desktop/repo/frontier-agentic-cobuild-rvas/docs/assets/img/logo-mark-slide.png">    </p:cNvPr>
           <p:cNvPicPr>
             <a:picLocks noChangeAspect="1"/>
           </p:cNvPicPr>
@@ -9364,7 +9364,7 @@
       </p:sp>
       <p:pic>
         <p:nvPicPr>
-          <p:cNvPr id="3" name="Image 0" descr="/home/marco/fy27-hackathons/frontier-ai-starter-kit-rvas/docs/assets/img/logo-mark-slide.png">    </p:cNvPr>
+          <p:cNvPr id="3" name="Image 0" descr="/Users/marco/Desktop/repo/frontier-agentic-cobuild-rvas/docs/assets/img/logo-mark-slide.png">    </p:cNvPr>
           <p:cNvPicPr>
             <a:picLocks noChangeAspect="1"/>
           </p:cNvPicPr>
@@ -9644,7 +9644,7 @@
       </p:sp>
       <p:pic>
         <p:nvPicPr>
-          <p:cNvPr id="3" name="Image 0" descr="/home/marco/fy27-hackathons/frontier-ai-starter-kit-rvas/docs/assets/img/logo-mark-slide.png">    </p:cNvPr>
+          <p:cNvPr id="3" name="Image 0" descr="/Users/marco/Desktop/repo/frontier-agentic-cobuild-rvas/docs/assets/img/logo-mark-slide.png">    </p:cNvPr>
           <p:cNvPicPr>
             <a:picLocks noChangeAspect="1"/>
           </p:cNvPicPr>
@@ -9924,7 +9924,7 @@
       </p:sp>
       <p:pic>
         <p:nvPicPr>
-          <p:cNvPr id="3" name="Image 0" descr="/home/marco/fy27-hackathons/frontier-ai-starter-kit-rvas/docs/assets/img/logo-mark-slide.png">    </p:cNvPr>
+          <p:cNvPr id="3" name="Image 0" descr="/Users/marco/Desktop/repo/frontier-agentic-cobuild-rvas/docs/assets/img/logo-mark-slide.png">    </p:cNvPr>
           <p:cNvPicPr>
             <a:picLocks noChangeAspect="1"/>
           </p:cNvPicPr>
@@ -10177,7 +10177,7 @@
       </p:grpSpPr>
       <p:pic>
         <p:nvPicPr>
-          <p:cNvPr id="2" name="Image 0" descr="/home/marco/fy27-hackathons/frontier-ai-starter-kit-rvas/docs/assets/img/logo-mark-white-slide.png">    </p:cNvPr>
+          <p:cNvPr id="2" name="Image 0" descr="/Users/marco/Desktop/repo/frontier-agentic-cobuild-rvas/docs/assets/img/logo-mark-white-slide.png">    </p:cNvPr>
           <p:cNvPicPr>
             <a:picLocks noChangeAspect="1"/>
           </p:cNvPicPr>
@@ -10601,7 +10601,7 @@
       </p:sp>
       <p:pic>
         <p:nvPicPr>
-          <p:cNvPr id="3" name="Image 0" descr="/home/marco/fy27-hackathons/frontier-ai-starter-kit-rvas/docs/assets/img/logo-mark-slide.png">    </p:cNvPr>
+          <p:cNvPr id="3" name="Image 0" descr="/Users/marco/Desktop/repo/frontier-agentic-cobuild-rvas/docs/assets/img/logo-mark-slide.png">    </p:cNvPr>
           <p:cNvPicPr>
             <a:picLocks noChangeAspect="1"/>
           </p:cNvPicPr>
@@ -10881,7 +10881,7 @@
       </p:sp>
       <p:pic>
         <p:nvPicPr>
-          <p:cNvPr id="3" name="Image 0" descr="/home/marco/fy27-hackathons/frontier-ai-starter-kit-rvas/docs/assets/img/logo-mark-slide.png">    </p:cNvPr>
+          <p:cNvPr id="3" name="Image 0" descr="/Users/marco/Desktop/repo/frontier-agentic-cobuild-rvas/docs/assets/img/logo-mark-slide.png">    </p:cNvPr>
           <p:cNvPicPr>
             <a:picLocks noChangeAspect="1"/>
           </p:cNvPicPr>
@@ -11667,7 +11667,7 @@
       </p:sp>
       <p:pic>
         <p:nvPicPr>
-          <p:cNvPr id="3" name="Image 0" descr="/home/marco/fy27-hackathons/frontier-ai-starter-kit-rvas/docs/assets/img/logo-mark-slide.png">    </p:cNvPr>
+          <p:cNvPr id="3" name="Image 0" descr="/Users/marco/Desktop/repo/frontier-agentic-cobuild-rvas/docs/assets/img/logo-mark-slide.png">    </p:cNvPr>
           <p:cNvPicPr>
             <a:picLocks noChangeAspect="1"/>
           </p:cNvPicPr>
@@ -11947,7 +11947,7 @@
       </p:sp>
       <p:pic>
         <p:nvPicPr>
-          <p:cNvPr id="3" name="Image 0" descr="/home/marco/fy27-hackathons/frontier-ai-starter-kit-rvas/docs/assets/img/logo-mark-slide.png">    </p:cNvPr>
+          <p:cNvPr id="3" name="Image 0" descr="/Users/marco/Desktop/repo/frontier-agentic-cobuild-rvas/docs/assets/img/logo-mark-slide.png">    </p:cNvPr>
           <p:cNvPicPr>
             <a:picLocks noChangeAspect="1"/>
           </p:cNvPicPr>
@@ -12192,7 +12192,7 @@
       </p:sp>
       <p:pic>
         <p:nvPicPr>
-          <p:cNvPr id="3" name="Image 0" descr="/home/marco/fy27-hackathons/frontier-ai-starter-kit-rvas/docs/assets/img/logo-mark-slide.png">    </p:cNvPr>
+          <p:cNvPr id="3" name="Image 0" descr="/Users/marco/Desktop/repo/frontier-agentic-cobuild-rvas/docs/assets/img/logo-mark-slide.png">    </p:cNvPr>
           <p:cNvPicPr>
             <a:picLocks noChangeAspect="1"/>
           </p:cNvPicPr>
@@ -12437,7 +12437,7 @@
       </p:sp>
       <p:pic>
         <p:nvPicPr>
-          <p:cNvPr id="3" name="Image 0" descr="/home/marco/fy27-hackathons/frontier-ai-starter-kit-rvas/docs/assets/img/logo-mark-slide.png">    </p:cNvPr>
+          <p:cNvPr id="3" name="Image 0" descr="/Users/marco/Desktop/repo/frontier-agentic-cobuild-rvas/docs/assets/img/logo-mark-slide.png">    </p:cNvPr>
           <p:cNvPicPr>
             <a:picLocks noChangeAspect="1"/>
           </p:cNvPicPr>
@@ -12682,7 +12682,7 @@
       </p:sp>
       <p:pic>
         <p:nvPicPr>
-          <p:cNvPr id="3" name="Image 0" descr="/home/marco/fy27-hackathons/frontier-ai-starter-kit-rvas/docs/assets/img/logo-mark-slide.png">    </p:cNvPr>
+          <p:cNvPr id="3" name="Image 0" descr="/Users/marco/Desktop/repo/frontier-agentic-cobuild-rvas/docs/assets/img/logo-mark-slide.png">    </p:cNvPr>
           <p:cNvPicPr>
             <a:picLocks noChangeAspect="1"/>
           </p:cNvPicPr>
